--- a/Week09/Week09_Advanced_UI_Animations.pptx
+++ b/Week09/Week09_Advanced_UI_Animations.pptx
@@ -3256,7 +3256,7 @@
                   <a:srgbClr val="FFFFFF"/>
                 </a:solidFill>
               </a:rPr>
-              <a:t>Advanced UI</a:t>
+              <a:t>UI កម្រិតខ្ពស់</a:t>
             </a:r>
           </a:p>
         </p:txBody>
@@ -3324,7 +3324,7 @@
                   <a:srgbClr val="AAAABB"/>
                 </a:solidFill>
               </a:rPr>
-              <a:t>SmartFarmerAssistant — Polishing a Professional iOS App</a:t>
+              <a:t>SmartFarmerAssistant — តុបតែង iOS App ឱ្យស្អាតជាក្រុមហ៊ុន</a:t>
             </a:r>
           </a:p>
         </p:txBody>
@@ -3990,7 +3990,7 @@
                   <a:srgbClr val="AAAABB"/>
                 </a:solidFill>
               </a:rPr>
-              <a:t>Accessibility</a:t>
+              <a:t>ភាពងាយស្រួលប្រើ</a:t>
             </a:r>
           </a:p>
         </p:txBody>
@@ -4127,7 +4127,7 @@
                   <a:srgbClr val="E94F97"/>
                 </a:solidFill>
               </a:rPr>
-              <a:t>♿  Accessibility</a:t>
+              <a:t>♿  ភាពងាយស្រួលប្រើ</a:t>
             </a:r>
           </a:p>
         </p:txBody>
@@ -4161,7 +4161,7 @@
                   <a:srgbClr val="FFFFFF"/>
                 </a:solidFill>
               </a:rPr>
-              <a:t>Accessibility Modifiers Used</a:t>
+              <a:t>Accessibility Modifiers ដែលប្រើ</a:t>
             </a:r>
           </a:p>
         </p:txBody>
@@ -4272,7 +4272,7 @@
                   <a:srgbClr val="AAAABB"/>
                 </a:solidFill>
               </a:rPr>
-              <a:t>Replaces default label for VoiceOver</a:t>
+              <a:t>ជំនួស label លំនាំដើម សម្រាប់ VoiceOver</a:t>
             </a:r>
           </a:p>
         </p:txBody>
@@ -4383,7 +4383,7 @@
                   <a:srgbClr val="AAAABB"/>
                 </a:solidFill>
               </a:rPr>
-              <a:t>Describes what happens on activation</a:t>
+              <a:t>ពិពណ៌នា អ្វីដែលកើតឡើងពេល activate</a:t>
             </a:r>
           </a:p>
         </p:txBody>
@@ -4494,7 +4494,7 @@
                   <a:srgbClr val="AAAABB"/>
                 </a:solidFill>
               </a:rPr>
-              <a:t>Groups sub-elements into one focusable unit</a:t>
+              <a:t>ដាក់ sub-elements ក្នុង unit ដែល focus បាន</a:t>
             </a:r>
           </a:p>
         </p:txBody>
@@ -4605,7 +4605,7 @@
                   <a:srgbClr val="AAAABB"/>
                 </a:solidFill>
               </a:rPr>
-              <a:t>Per-row label in PestGuide list</a:t>
+              <a:t>label ក្នុង row នីមួយៗ PestGuide list</a:t>
             </a:r>
           </a:p>
         </p:txBody>
@@ -4716,7 +4716,7 @@
                   <a:srgbClr val="AAAABB"/>
                 </a:solidFill>
               </a:rPr>
-              <a:t>Added to top-level nav for screen identity</a:t>
+              <a:t>បន្ថែមទៅ nav កម្រិតខ្ពស់ ដើម្បី identity screen</a:t>
             </a:r>
           </a:p>
         </p:txBody>
@@ -5060,7 +5060,7 @@
                   <a:srgbClr val="FFFFFF"/>
                 </a:solidFill>
               </a:rPr>
-              <a:t>Use .font(.headline), .font(.caption) — NOT fixed Pt sizes — so text scales with user preferences.</a:t>
+              <a:t>ប្រើ .font(.headline), .font(.caption) — ជំនួស Pt fixed — ឱ្យ text scale ទៅតាម preferences</a:t>
             </a:r>
           </a:p>
         </p:txBody>
@@ -5197,7 +5197,7 @@
                   <a:srgbClr val="FFD700"/>
                 </a:solidFill>
               </a:rPr>
-              <a:t>📊  Before vs After — Week 9 Polish</a:t>
+              <a:t>📊  មុន vs ក្រោយ — ការតុបតែង Week 9</a:t>
             </a:r>
           </a:p>
         </p:txBody>
@@ -5317,7 +5317,7 @@
                   <a:srgbClr val="FFFFFF"/>
                 </a:solidFill>
               </a:rPr>
-              <a:t>❌  Before (Week 8)</a:t>
+              <a:t>❌  មុន (Week 8)</a:t>
             </a:r>
           </a:p>
         </p:txBody>
@@ -5359,7 +5359,7 @@
                   <a:srgbClr val="AAAABB"/>
                 </a:solidFill>
               </a:rPr>
-              <a:t>Inline styling repeated in every view</a:t>
+              <a:t>Inline styling ដដែលៗរៀងរាល់ View</a:t>
             </a:r>
           </a:p>
           <a:p>
@@ -5378,7 +5378,7 @@
                   <a:srgbClr val="AAAABB"/>
                 </a:solidFill>
               </a:rPr>
-              <a:t>Buttons respond instantly — no tactile feedback</a:t>
+              <a:t>Buttons ឆ្លើយតបភ្លាមៗ — គ្មាន tactile feedback</a:t>
             </a:r>
           </a:p>
           <a:p>
@@ -5397,7 +5397,7 @@
                   <a:srgbClr val="AAAABB"/>
                 </a:solidFill>
               </a:rPr>
-              <a:t>Lists appear all at once — jarring</a:t>
+              <a:t>Lists លោតចេញតែមួយដង — ខ្ទាស</a:t>
             </a:r>
           </a:p>
           <a:p>
@@ -5416,7 +5416,7 @@
                   <a:srgbClr val="AAAABB"/>
                 </a:solidFill>
               </a:rPr>
-              <a:t>No pull-to-refresh on any screen</a:t>
+              <a:t>គ្មាន pull-to-refresh លើ screen ណាមួយ</a:t>
             </a:r>
           </a:p>
           <a:p>
@@ -5435,7 +5435,7 @@
                   <a:srgbClr val="AAAABB"/>
                 </a:solidFill>
               </a:rPr>
-              <a:t>Empty states show plain grey text</a:t>
+              <a:t>Empty states បង្ហាញ text ប្រផេះធម្មតា</a:t>
             </a:r>
           </a:p>
           <a:p>
@@ -5454,7 +5454,7 @@
                   <a:srgbClr val="AAAABB"/>
                 </a:solidFill>
               </a:rPr>
-              <a:t>VoiceOver reads raw element children</a:t>
+              <a:t>VoiceOver អានតែ elements ដើម</a:t>
             </a:r>
           </a:p>
           <a:p>
@@ -5473,7 +5473,7 @@
                   <a:srgbClr val="AAAABB"/>
                 </a:solidFill>
               </a:rPr>
-              <a:t>Hardcoded white backgrounds break in dark mode</a:t>
+              <a:t>White backgrounds hardcoded ខូចក្នុង dark mode</a:t>
             </a:r>
           </a:p>
           <a:p>
@@ -5492,7 +5492,7 @@
                   <a:srgbClr val="AAAABB"/>
                 </a:solidFill>
               </a:rPr>
-              <a:t>No loading indicator while data loads</a:t>
+              <a:t>គ្មាន loading indicator ពេលទាញទិន្នន័យ</a:t>
             </a:r>
           </a:p>
         </p:txBody>
@@ -5612,7 +5612,7 @@
                   <a:srgbClr val="1A1A2E"/>
                 </a:solidFill>
               </a:rPr>
-              <a:t>✅  After (Week 9)</a:t>
+              <a:t>✅  ក្រោយ (Week 9)</a:t>
             </a:r>
           </a:p>
         </p:txBody>
@@ -5654,7 +5654,7 @@
                   <a:srgbClr val="FFFFFF"/>
                 </a:solidFill>
               </a:rPr>
-              <a:t>.farmCard() modifier centralises all card styling</a:t>
+              <a:t>.farmCard() modifier ប្រមូលរំដោះ card styling ទាំងអស់</a:t>
             </a:r>
           </a:p>
           <a:p>
@@ -5673,7 +5673,7 @@
                   <a:srgbClr val="FFFFFF"/>
                 </a:solidFill>
               </a:rPr>
-              <a:t>.scalePress() gives springy tactile press animation</a:t>
+              <a:t>.scalePress() ឱ្យ animation ចុចដូចស្ព្រីង</a:t>
             </a:r>
           </a:p>
           <a:p>
@@ -5692,7 +5692,7 @@
                   <a:srgbClr val="FFFFFF"/>
                 </a:solidFill>
               </a:rPr>
-              <a:t>.fadeIn(delay:) staggers row appearance smoothly</a:t>
+              <a:t>.fadeIn(delay:) ធ្វើ rows លេចចេញម្ដងៗ</a:t>
             </a:r>
           </a:p>
           <a:p>
@@ -5711,7 +5711,7 @@
                   <a:srgbClr val="FFFFFF"/>
                 </a:solidFill>
               </a:rPr>
-              <a:t>.refreshable {} on Dashboard, Finance, PestGuide</a:t>
+              <a:t>.refreshable {} លើ Dashboard, Finance, PestGuide</a:t>
             </a:r>
           </a:p>
           <a:p>
@@ -5730,7 +5730,7 @@
                   <a:srgbClr val="FFFFFF"/>
                 </a:solidFill>
               </a:rPr>
-              <a:t>EmptyStateView with icon + title + action button</a:t>
+              <a:t>EmptyStateView ជាមួយ icon + title + button</a:t>
             </a:r>
           </a:p>
           <a:p>
@@ -5749,7 +5749,7 @@
                   <a:srgbClr val="FFFFFF"/>
                 </a:solidFill>
               </a:rPr>
-              <a:t>accessibilityLabel on every focusable element</a:t>
+              <a:t>accessibilityLabel លើ elements focus-able ទាំងអស់</a:t>
             </a:r>
           </a:p>
           <a:p>
@@ -5768,7 +5768,7 @@
                   <a:srgbClr val="FFFFFF"/>
                 </a:solidFill>
               </a:rPr>
-              <a:t>Color(.systemBackground) auto-adapts light/dark</a:t>
+              <a:t>Color(.systemBackground) ស្ដាប់ light/dark ដោយស្វ័យ</a:t>
             </a:r>
           </a:p>
           <a:p>
@@ -5787,7 +5787,7 @@
                   <a:srgbClr val="FFFFFF"/>
                 </a:solidFill>
               </a:rPr>
-              <a:t>LoadingRowView skeleton while refreshing</a:t>
+              <a:t>LoadingRowView skeleton ពេល refresh</a:t>
             </a:r>
           </a:p>
         </p:txBody>
@@ -5924,7 +5924,7 @@
                   <a:srgbClr val="1BB889"/>
                 </a:solidFill>
               </a:rPr>
-              <a:t>🎯  Summary &amp; What's Next</a:t>
+              <a:t>🎯  សង្ខេប &amp; ជំហានបន្ទាប់</a:t>
             </a:r>
           </a:p>
         </p:txBody>
@@ -5958,7 +5958,7 @@
                   <a:srgbClr val="FFFFFF"/>
                 </a:solidFill>
               </a:rPr>
-              <a:t>Week 9 Deliverables</a:t>
+              <a:t>លទ្ធផល Week 9</a:t>
             </a:r>
           </a:p>
         </p:txBody>
@@ -6000,7 +6000,7 @@
                   <a:srgbClr val="FFFFFF"/>
                 </a:solidFill>
               </a:rPr>
-              <a:t>Components/ViewModifiers.swift — 5 modifiers + View extensions</a:t>
+              <a:t>Components/ViewModifiers.swift — modifiers 5 + View extensions</a:t>
             </a:r>
           </a:p>
           <a:p>
@@ -6038,7 +6038,7 @@
                   <a:srgbClr val="FFFFFF"/>
                 </a:solidFill>
               </a:rPr>
-              <a:t>Components/PrimaryButton.swift — 3 button variants</a:t>
+              <a:t>Components/PrimaryButton.swift — button variants ០៣</a:t>
             </a:r>
           </a:p>
           <a:p>
@@ -6095,7 +6095,7 @@
                   <a:srgbClr val="FFFFFF"/>
                 </a:solidFill>
               </a:rPr>
-              <a:t>PestGuide: per-row fade, skeleton loading, refreshable list</a:t>
+              <a:t>PestGuide: fade ក្នុង row, skeleton loading, refreshable list</a:t>
             </a:r>
           </a:p>
           <a:p>
@@ -6114,7 +6114,7 @@
                   <a:srgbClr val="FFFFFF"/>
                 </a:solidFill>
               </a:rPr>
-              <a:t>Finance: staggered summary cards, pull-to-refresh</a:t>
+              <a:t>Finance: summary cards staggered, pull-to-refresh</a:t>
             </a:r>
           </a:p>
         </p:txBody>
@@ -6148,7 +6148,7 @@
                   <a:srgbClr val="FFFFFF"/>
                 </a:solidFill>
               </a:rPr>
-              <a:t>Coming Up — Week 10</a:t>
+              <a:t>ខាងមុខ — Week 10</a:t>
             </a:r>
           </a:p>
         </p:txBody>
@@ -6190,7 +6190,7 @@
                   <a:srgbClr val="FFFFFF"/>
                 </a:solidFill>
               </a:rPr>
-              <a:t>CloudKit sync — share farm data across devices</a:t>
+              <a:t>CloudKit sync — ចែករំលែកទិន្នន័យចម្ការ</a:t>
             </a:r>
           </a:p>
           <a:p>
@@ -6209,7 +6209,7 @@
                   <a:srgbClr val="FFFFFF"/>
                 </a:solidFill>
               </a:rPr>
-              <a:t>WidgetKit — farm summary on the Home Screen</a:t>
+              <a:t>WidgetKit — សង្ខេបចម្ការ Home Screen</a:t>
             </a:r>
           </a:p>
           <a:p>
@@ -6228,7 +6228,7 @@
                   <a:srgbClr val="FFFFFF"/>
                 </a:solidFill>
               </a:rPr>
-              <a:t>App Store submission checklist</a:t>
+              <a:t>Checklist ដាក់ App Store</a:t>
             </a:r>
           </a:p>
           <a:p>
@@ -6247,7 +6247,7 @@
                   <a:srgbClr val="FFFFFF"/>
                 </a:solidFill>
               </a:rPr>
-              <a:t>TestFlight internal distribution</a:t>
+              <a:t>TestFlight distribution ខាងក្នុង</a:t>
             </a:r>
           </a:p>
           <a:p>
@@ -6266,7 +6266,7 @@
                   <a:srgbClr val="FFFFFF"/>
                 </a:solidFill>
               </a:rPr>
-              <a:t>Performance profiling with Instruments</a:t>
+              <a:t>Performance profiling ជាមួយ Instruments</a:t>
             </a:r>
           </a:p>
         </p:txBody>
@@ -6343,7 +6343,7 @@
                   <a:srgbClr val="1A1A2E"/>
                 </a:solidFill>
               </a:rPr>
-              <a:t>💡  Key Takeaway</a:t>
+              <a:t>💡  ចំណាំសំខាន់</a:t>
             </a:r>
           </a:p>
         </p:txBody>
@@ -6377,7 +6377,7 @@
                   <a:srgbClr val="1A1A2E"/>
                 </a:solidFill>
               </a:rPr>
-              <a:t>Polished UX is not about adding complexity — it's about applying consistent patterns (ViewModifiers, reusable components) that make every interaction feel intentional.</a:t>
+              <a:t>UX ស្អាតមិនមែនអំពីការបន្ថែម complexity — វាអំពីការប្រើ patterns ស៊ីសង្វាក់ (ViewModifiers, reusable components) ដែលធ្វើ interactions ទាំងអស់ ចេះចង់</a:t>
             </a:r>
           </a:p>
         </p:txBody>
@@ -6514,7 +6514,7 @@
                   <a:srgbClr val="1BB889"/>
                 </a:solidFill>
               </a:rPr>
-              <a:t>📋  Agenda — Week 9</a:t>
+              <a:t>📋  របៀបវារៈ — Week 9</a:t>
             </a:r>
           </a:p>
         </p:txBody>
@@ -6659,7 +6659,7 @@
                   <a:srgbClr val="AAAABB"/>
                 </a:solidFill>
               </a:rPr>
-              <a:t>Consistent styling across all views</a:t>
+              <a:t>រចនាប័ទ្មស្អាតឆ្លងកាត់គ្រប់ Views</a:t>
             </a:r>
           </a:p>
         </p:txBody>
@@ -6770,7 +6770,7 @@
                   <a:srgbClr val="FFFFFF"/>
                 </a:solidFill>
               </a:rPr>
-              <a:t>Reusable Components</a:t>
+              <a:t>Components ប្រើម្ដងហើយម្ដងទៀត</a:t>
             </a:r>
           </a:p>
         </p:txBody>
@@ -7350,7 +7350,7 @@
                   <a:srgbClr val="FFFFFF"/>
                 </a:solidFill>
               </a:rPr>
-              <a:t>Accessibility</a:t>
+              <a:t>ភាពងាយស្រួលប្រើ</a:t>
             </a:r>
           </a:p>
         </p:txBody>
@@ -7555,7 +7555,7 @@
                   <a:srgbClr val="FFFFFF"/>
                 </a:solidFill>
               </a:rPr>
-              <a:t>What is a ViewModifier?</a:t>
+              <a:t>ViewModifier គឺជាអ្វី?</a:t>
             </a:r>
           </a:p>
         </p:txBody>
@@ -7597,7 +7597,7 @@
                   <a:srgbClr val="FFFFFF"/>
                 </a:solidFill>
               </a:rPr>
-              <a:t>A reusable block of view transformations (background, shadow, corner radius…)</a:t>
+              <a:t>ប្លុក transformations ប្រើម្ដងហើយម្ដងទៀត (background, shadow, corner radius…)</a:t>
             </a:r>
           </a:p>
           <a:p>
@@ -7616,7 +7616,7 @@
                   <a:srgbClr val="FFFFFF"/>
                 </a:solidFill>
               </a:rPr>
-              <a:t>Applied with .modifier(MyModifier()) or the shorter .myModifier() extension</a:t>
+              <a:t>ប្រើ .modifier(MyModifier()) ឬ extension .myModifier() ខ្លីជាង</a:t>
             </a:r>
           </a:p>
           <a:p>
@@ -7635,7 +7635,7 @@
                   <a:srgbClr val="FFFFFF"/>
                 </a:solidFill>
               </a:rPr>
-              <a:t>Keeps view code DRY — one change updates every card in the app</a:t>
+              <a:t>View code DRY — ផ្លាស់ប្ដូរម្ដង ធ្វើបច្ចុប្បន្នភាព cards ទាំងអស់</a:t>
             </a:r>
           </a:p>
           <a:p>
@@ -7654,7 +7654,7 @@
                   <a:srgbClr val="FFFFFF"/>
                 </a:solidFill>
               </a:rPr>
-              <a:t>Can hold @State, @Environment, and respond to dark mode / accessibility</a:t>
+              <a:t>អាចមាន @State, @Environment ហើយ respond ទៅ dark mode / accessibility</a:t>
             </a:r>
           </a:p>
         </p:txBody>
@@ -7897,7 +7897,7 @@
                   <a:srgbClr val="00C9C8"/>
                 </a:solidFill>
               </a:rPr>
-              <a:t>✅  Usage</a:t>
+              <a:t>✅  ការប្រើប្រាស់</a:t>
             </a:r>
           </a:p>
         </p:txBody>
@@ -8199,7 +8199,7 @@
                   <a:srgbClr val="F39620"/>
                 </a:solidFill>
               </a:rPr>
-              <a:t>FadeInModifier — staggered list entrance</a:t>
+              <a:t>FadeInModifier — entrance list ជំហាន</a:t>
             </a:r>
           </a:p>
         </p:txBody>
@@ -8507,7 +8507,7 @@
                   <a:srgbClr val="287DFA"/>
                 </a:solidFill>
               </a:rPr>
-              <a:t>ScalePressModifier — tactile button feedback</a:t>
+              <a:t>ScalePressModifier — feedback button ពេលចុច</a:t>
             </a:r>
           </a:p>
         </p:txBody>
@@ -8794,7 +8794,7 @@
                   <a:srgbClr val="00C9C8"/>
                 </a:solidFill>
               </a:rPr>
-              <a:t>Usage — stagger cards in Dashboard:</a:t>
+              <a:t>ការប្រើប្រាស់ — stagger cards ក្នុង Dashboard:</a:t>
             </a:r>
           </a:p>
         </p:txBody>
@@ -9030,7 +9030,7 @@
                   <a:srgbClr val="287DFA"/>
                 </a:solidFill>
               </a:rPr>
-              <a:t>🃏  FarmCard — Generic Container</a:t>
+              <a:t>🃏  FarmCard — Container ទូទៅ</a:t>
             </a:r>
           </a:p>
         </p:txBody>
@@ -9671,7 +9671,7 @@
                   <a:srgbClr val="AAAABB"/>
                 </a:solidFill>
               </a:rPr>
-              <a:t>← FarmCard renders any content</a:t>
+              <a:t>← FarmCard render content ណាមួយ</a:t>
             </a:r>
           </a:p>
         </p:txBody>
@@ -9705,7 +9705,7 @@
                   <a:srgbClr val="00C9C8"/>
                 </a:solidFill>
               </a:rPr>
-              <a:t>Usage:</a:t>
+              <a:t>ការប្រើប្រាស់:</a:t>
             </a:r>
           </a:p>
         </p:txBody>
@@ -9815,7 +9815,7 @@
                 </a:solidFill>
                 <a:latin typeface="Courier New"/>
               </a:rPr>
-              <a:t>    // any SwiftUI view here</a:t>
+              <a:t>    // SwiftUI view ណាមួយ</a:t>
             </a:r>
           </a:p>
           <a:p>
@@ -10796,7 +10796,7 @@
                   <a:srgbClr val="AAAABB"/>
                 </a:solidFill>
               </a:rPr>
-              <a:t>Three animation patterns used in Week 9:</a:t>
+              <a:t>Pattern animation ០៣ ប្រើក្នុង Week 9:</a:t>
             </a:r>
           </a:p>
         </p:txBody>
@@ -10950,7 +10950,7 @@
                   <a:srgbClr val="FFFFFF"/>
                 </a:solidFill>
               </a:rPr>
-              <a:t>• Applied to each Dashboard section on .onAppear</a:t>
+              <a:t>• ប្រើលើ Dashboard section នីមួយៗ នៅ .onAppear</a:t>
             </a:r>
           </a:p>
         </p:txBody>
@@ -10984,7 +10984,7 @@
                   <a:srgbClr val="FFFFFF"/>
                 </a:solidFill>
               </a:rPr>
-              <a:t>• delay: 0.1s per section → creates a waterfall effect</a:t>
+              <a:t>• delay: 0.1s ក្នុង section → បង្កើត waterfall effect</a:t>
             </a:r>
           </a:p>
         </p:txBody>
@@ -11271,7 +11271,7 @@
                   <a:srgbClr val="FFFFFF"/>
                 </a:solidFill>
               </a:rPr>
-              <a:t>• Uses @GestureState + DragGesture(minimumDistance:0)</a:t>
+              <a:t>• ប្រើ @GestureState + DragGesture(minimumDistance:0)</a:t>
             </a:r>
           </a:p>
         </p:txBody>
@@ -11305,7 +11305,7 @@
                   <a:srgbClr val="FFFFFF"/>
                 </a:solidFill>
               </a:rPr>
-              <a:t>• scaleEffect 1.0 → 0.96 on press, springs back</a:t>
+              <a:t>• scaleEffect 1.0 → 0.96 ពេលចុច ត្រឡប់វិញ</a:t>
             </a:r>
           </a:p>
         </p:txBody>
@@ -11339,7 +11339,7 @@
                   <a:srgbClr val="FFFFFF"/>
                 </a:solidFill>
               </a:rPr>
-              <a:t>• Applied to QuickActionButton, PrimaryButton, toolbar</a:t>
+              <a:t>• ប្រើលើ QuickActionButton, PrimaryButton, toolbar</a:t>
             </a:r>
           </a:p>
         </p:txBody>
@@ -11504,7 +11504,7 @@
                   <a:srgbClr val="1BB889"/>
                 </a:solidFill>
               </a:rPr>
-              <a:t>List Rows (Per-Row)</a:t>
+              <a:t>List Rows (ក្នុងrow)</a:t>
             </a:r>
           </a:p>
         </p:txBody>
@@ -11649,7 +11649,7 @@
                   <a:srgbClr val="FFFFFF"/>
                 </a:solidFill>
               </a:rPr>
-              <a:t>• Max ~20 rows × 0.05 = 1.0 s total stagger</a:t>
+              <a:t>• Max ~20 rows × 0.05 = 1.0 វ stagger សរុប</a:t>
             </a:r>
           </a:p>
         </p:txBody>
@@ -12513,7 +12513,7 @@
                   <a:srgbClr val="FFFFFF"/>
                 </a:solidFill>
               </a:rPr>
-              <a:t>Show skeleton while refreshing in PestGuideTabView:</a:t>
+              <a:t>បង្ហាញ skeleton ពេល refresh ក្នុង PestGuideTabView:</a:t>
             </a:r>
           </a:p>
         </p:txBody>
@@ -12782,7 +12782,7 @@
                   <a:srgbClr val="8E44AD"/>
                 </a:solidFill>
               </a:rPr>
-              <a:t>🌙  Dark Mode Support</a:t>
+              <a:t>🌙  ការគាំទ្រ Dark Mode</a:t>
             </a:r>
           </a:p>
         </p:txBody>
@@ -12816,7 +12816,7 @@
                   <a:srgbClr val="AAAABB"/>
                 </a:solidFill>
               </a:rPr>
-              <a:t>SwiftUI adaptive color system — automatic dark mode:</a:t>
+              <a:t>ប្រព័ន្ធ adaptive color SwiftUI — dark mode ស្វ័យប្រវត្តិ:</a:t>
             </a:r>
           </a:p>
         </p:txBody>
@@ -12893,7 +12893,7 @@
                   <a:srgbClr val="00C9C8"/>
                 </a:solidFill>
               </a:rPr>
-              <a:t>Color Usage</a:t>
+              <a:t>ការប្រើ Color</a:t>
             </a:r>
           </a:p>
         </p:txBody>
@@ -12961,7 +12961,7 @@
                   <a:srgbClr val="00C9C8"/>
                 </a:solidFill>
               </a:rPr>
-              <a:t>Adapts Automatically</a:t>
+              <a:t>ស្ដាប់ Dynamic Mode</a:t>
             </a:r>
           </a:p>
         </p:txBody>
@@ -13865,7 +13865,7 @@
                   <a:srgbClr val="FFD700"/>
                 </a:solidFill>
               </a:rPr>
-              <a:t>Key Rule:</a:t>
+              <a:t>ច្បាប់សំខាន់:</a:t>
             </a:r>
           </a:p>
         </p:txBody>
@@ -13899,7 +13899,7 @@
                   <a:srgbClr val="FFFFFF"/>
                 </a:solidFill>
               </a:rPr>
-              <a:t>Prefer semantic UIColor names (systemBackground, label, secondaryLabel) over hardcoded hex values. SwiftUI automatically switches them in dark mode.</a:t>
+              <a:t>ប្រើឈ្មោះ semantic UIColor (systemBackground, label) ជាជំនួស hex hardcoded។ SwiftUI ផ្លាស់ប្ដូរដោយស្វ័យប្រវត្តិ</a:t>
             </a:r>
           </a:p>
         </p:txBody>
